--- a/docs/m5/智岗罗盘_答辩PPT_终稿.pptx
+++ b/docs/m5/智岗罗盘_答辩PPT_终稿.pptx
@@ -3049,49 +3049,6 @@
           </a:p>
         </p:txBody>
       </p:sp>
-      <p:sp>
-        <p:nvSpPr>
-          <p:cNvPr id="9" name="AILabel"/>
-          <p:cNvSpPr txBox="1"/>
-          <p:nvPr/>
-        </p:nvSpPr>
-        <p:spPr>
-          <a:xfrm>
-            <a:off x="9612000" y="6278000"/>
-            <a:ext cx="2400000" cy="400000"/>
-          </a:xfrm>
-          <a:prstGeom prst="rect">
-            <a:avLst/>
-          </a:prstGeom>
-          <a:solidFill>
-            <a:srgbClr val="000000">
-              <a:alpha val="50000"/>
-            </a:srgbClr>
-          </a:solidFill>
-          <a:ln w="12700">
-            <a:solidFill>
-              <a:srgbClr val="FFFFFF"/>
-            </a:solidFill>
-          </a:ln>
-        </p:spPr>
-        <p:txBody>
-          <a:bodyPr wrap="square" rtlCol="0" anchor="ctr" lIns="91440" tIns="45720" rIns="91440" bIns="45720"/>
-          <a:lstStyle/>
-          <a:p>
-            <a:pPr algn="ctr"/>
-            <a:r>
-              <a:rPr lang="zh-CN" sz="1400" b="1" dirty="0">
-                <a:solidFill>
-                  <a:srgbClr val="FFFFFF"/>
-                </a:solidFill>
-                <a:latin typeface="Arial"/>
-                <a:ea typeface="SimSun"/>
-              </a:rPr>
-              <a:t>含 AI 生成</a:t>
-            </a:r>
-          </a:p>
-        </p:txBody>
-      </p:sp>
     </p:spTree>
   </p:cSld>
   <p:clrMapOvr>
@@ -3744,7 +3701,7 @@
                 <a:ea typeface="Microsoft YaHei" pitchFamily="34" charset="-122"/>
                 <a:cs typeface="Microsoft YaHei" pitchFamily="34" charset="-120"/>
               </a:rPr>
-              <a:t>四视图切换</a:t>
+              <a:t>三视图切换</a:t>
             </a:r>
             <a:endParaRPr lang="en-US" sz="1400" dirty="0"/>
           </a:p>
@@ -3800,7 +3757,7 @@
                 <a:ea typeface="Microsoft YaHei" pitchFamily="34" charset="-122"/>
                 <a:cs typeface="Microsoft YaHei" pitchFamily="34" charset="-120"/>
               </a:rPr>
-              <a:t>level · positionCenter</a:t>
+              <a:t>positionPortrait</a:t>
             </a:r>
             <a:endParaRPr lang="en-US" sz="1200" dirty="0"/>
           </a:p>
@@ -4771,7 +4728,7 @@
                 <a:ea typeface="SimSun" pitchFamily="34" charset="-122"/>
                 <a:cs typeface="SimSun" pitchFamily="34" charset="-120"/>
               </a:rPr>
-              <a:t>0.9629</a:t>
+              <a:t>0.9632</a:t>
             </a:r>
             <a:endParaRPr lang="en-US" sz="4000" dirty="0"/>
           </a:p>
@@ -4849,7 +4806,7 @@
                 <a:ea typeface="Microsoft YaHei" pitchFamily="34" charset="-122"/>
                 <a:cs typeface="Microsoft YaHei" pitchFamily="34" charset="-120"/>
               </a:rPr>
-              <a:t>110 条 gold · 目标 0.90</a:t>
+              <a:t>110 条 gold 三跑一致 · 目标 0.90</a:t>
             </a:r>
             <a:endParaRPr lang="en-US" sz="1150" dirty="0"/>
           </a:p>
@@ -4915,7 +4872,7 @@
                 <a:ea typeface="SimSun" pitchFamily="34" charset="-122"/>
                 <a:cs typeface="SimSun" pitchFamily="34" charset="-120"/>
               </a:rPr>
-              <a:t>0.988</a:t>
+              <a:t>0.987</a:t>
             </a:r>
             <a:endParaRPr lang="en-US" sz="4000" dirty="0"/>
           </a:p>
@@ -4993,7 +4950,7 @@
                 <a:ea typeface="Microsoft YaHei" pitchFamily="34" charset="-122"/>
                 <a:cs typeface="Microsoft YaHei" pitchFamily="34" charset="-120"/>
               </a:rPr>
-              <a:t>字段级抽取真值</a:t>
+              <a:t>50 条 · 零幻觉误报</a:t>
             </a:r>
             <a:endParaRPr lang="en-US" sz="1150" dirty="0"/>
           </a:p>
@@ -5059,7 +5016,7 @@
                 <a:ea typeface="SimSun" pitchFamily="34" charset="-122"/>
                 <a:cs typeface="SimSun" pitchFamily="34" charset="-120"/>
               </a:rPr>
-              <a:t>0.8906</a:t>
+              <a:t>0.9141</a:t>
             </a:r>
             <a:endParaRPr lang="en-US" sz="4000" dirty="0"/>
           </a:p>
@@ -5137,7 +5094,7 @@
                 <a:ea typeface="Microsoft YaHei" pitchFamily="34" charset="-122"/>
                 <a:cs typeface="Microsoft YaHei" pitchFamily="34" charset="-120"/>
               </a:rPr>
-              <a:t>BT 权重 v2 · 384 对 · Top-3 1.0</a:t>
+              <a:t>384 对黄金集 · Top-3 命中 100%</a:t>
             </a:r>
             <a:endParaRPr lang="en-US" sz="1150" dirty="0"/>
           </a:p>
@@ -6776,7 +6733,7 @@
                 <a:ea typeface="Microsoft YaHei" pitchFamily="34" charset="-122"/>
                 <a:cs typeface="Microsoft YaHei" pitchFamily="34" charset="-120"/>
               </a:rPr>
-              <a:t>另有：岗位职能域 15 个（LLM 语义命名，覆盖公开岗 100%）· 技能分类权威覆盖 23.9%（用户可见视图 91.7%）· 匹配黄金对 v1/v2 684 组</a:t>
+              <a:t>另有：5 大骨干职能域 + 通用域兜底（LLM 语义命名 + 归类制）· 技能分类权威覆盖 23.9%（用户可见视图 91.7%）· 匹配黄金对 v1/v2 684 组</a:t>
             </a:r>
             <a:endParaRPr lang="en-US" sz="1250" dirty="0"/>
           </a:p>
@@ -9305,7 +9262,7 @@
                 <a:ea typeface="SimSun" pitchFamily="34" charset="-122"/>
                 <a:cs typeface="SimSun" pitchFamily="34" charset="-120"/>
               </a:rPr>
-              <a:t>0.9629</a:t>
+              <a:t>0.9632</a:t>
             </a:r>
             <a:endParaRPr lang="en-US" sz="4600" dirty="0"/>
           </a:p>
@@ -9445,7 +9402,7 @@
                 <a:ea typeface="SimSun" pitchFamily="34" charset="-122"/>
                 <a:cs typeface="SimSun" pitchFamily="34" charset="-120"/>
               </a:rPr>
-              <a:t>0.8906</a:t>
+              <a:t>0.9141</a:t>
             </a:r>
             <a:endParaRPr lang="en-US" sz="4600" dirty="0"/>
           </a:p>
@@ -9523,7 +9480,7 @@
                 <a:ea typeface="Microsoft YaHei" pitchFamily="34" charset="-122"/>
                 <a:cs typeface="Microsoft YaHei" pitchFamily="34" charset="-120"/>
               </a:rPr>
-              <a:t>BT 权重 v2 · Spearman 0.88</a:t>
+              <a:t>384 对黄金集 · Top-3 命中 100%</a:t>
             </a:r>
             <a:endParaRPr lang="en-US" sz="1200" dirty="0"/>
           </a:p>
@@ -12265,7 +12222,7 @@
                 <a:ea typeface="Microsoft YaHei" pitchFamily="34" charset="-122"/>
                 <a:cs typeface="Microsoft YaHei" pitchFamily="34" charset="-120"/>
               </a:rPr>
-              <a:t>四项核心指标全部达标：JD 解析 0.9629 · 匹配 0.8906 · 学习路径 96.7% · P95 430ms</a:t>
+              <a:t>四项核心指标全部达标：JD 解析 0.9632 · 匹配 0.9141 · 学习路径 96.7% · P95 430ms</a:t>
             </a:r>
             <a:endParaRPr lang="en-US" sz="1550" dirty="0"/>
           </a:p>
@@ -15810,7 +15767,7 @@
                 <a:ea typeface="Microsoft YaHei" pitchFamily="34" charset="-122"/>
                 <a:cs typeface="Microsoft YaHei" pitchFamily="34" charset="-120"/>
               </a:rPr>
-              <a:t>15 个岗位职能域（LLM 语义命名），覆盖公开岗位 100%</a:t>
+              <a:t>5 大骨干职能域 + 通用域兜底（LLM 语义命名 + 归类制治理），归类依据逐岗可查</a:t>
             </a:r>
             <a:endParaRPr lang="en-US" sz="1400" dirty="0"/>
           </a:p>
@@ -16494,7 +16451,7 @@
                 <a:ea typeface="SimSun" pitchFamily="34" charset="-122"/>
                 <a:cs typeface="SimSun" pitchFamily="34" charset="-120"/>
               </a:rPr>
-              <a:t>0.9629</a:t>
+              <a:t>0.9632</a:t>
             </a:r>
             <a:endParaRPr lang="en-US" sz="3600" dirty="0"/>
           </a:p>
@@ -16650,7 +16607,7 @@
                 <a:ea typeface="SimSun" pitchFamily="34" charset="-122"/>
                 <a:cs typeface="SimSun" pitchFamily="34" charset="-120"/>
               </a:rPr>
-              <a:t>0.8825</a:t>
+              <a:t>0.8865</a:t>
             </a:r>
             <a:endParaRPr lang="en-US" sz="3600" dirty="0"/>
           </a:p>

--- a/docs/m5/智岗罗盘_答辩PPT_终稿.pptx
+++ b/docs/m5/智岗罗盘_答辩PPT_终稿.pptx
@@ -4806,7 +4806,7 @@
                 <a:ea typeface="Microsoft YaHei" pitchFamily="34" charset="-122"/>
                 <a:cs typeface="Microsoft YaHei" pitchFamily="34" charset="-120"/>
               </a:rPr>
-              <a:t>110 条 gold 三跑一致 · 目标 0.90</a:t>
+              <a:t>110 条 gold 词面豁免口径 · 目标 0.90</a:t>
             </a:r>
             <a:endParaRPr lang="en-US" sz="1150" dirty="0"/>
           </a:p>
@@ -4872,7 +4872,7 @@
                 <a:ea typeface="SimSun" pitchFamily="34" charset="-122"/>
                 <a:cs typeface="SimSun" pitchFamily="34" charset="-120"/>
               </a:rPr>
-              <a:t>0.987</a:t>
+              <a:t>0.988</a:t>
             </a:r>
             <a:endParaRPr lang="en-US" sz="4000" dirty="0"/>
           </a:p>
@@ -4950,7 +4950,7 @@
                 <a:ea typeface="Microsoft YaHei" pitchFamily="34" charset="-122"/>
                 <a:cs typeface="Microsoft YaHei" pitchFamily="34" charset="-120"/>
               </a:rPr>
-              <a:t>50 条 · 零幻觉误报</a:t>
+              <a:t>50 条</a:t>
             </a:r>
             <a:endParaRPr lang="en-US" sz="1150" dirty="0"/>
           </a:p>
@@ -5016,7 +5016,7 @@
                 <a:ea typeface="SimSun" pitchFamily="34" charset="-122"/>
                 <a:cs typeface="SimSun" pitchFamily="34" charset="-120"/>
               </a:rPr>
-              <a:t>0.9141</a:t>
+              <a:t>0.9714</a:t>
             </a:r>
             <a:endParaRPr lang="en-US" sz="4000" dirty="0"/>
           </a:p>
@@ -5094,7 +5094,7 @@
                 <a:ea typeface="Microsoft YaHei" pitchFamily="34" charset="-122"/>
                 <a:cs typeface="Microsoft YaHei" pitchFamily="34" charset="-120"/>
               </a:rPr>
-              <a:t>384 对黄金集 · Top-3 命中 100%</a:t>
+              <a:t>384 对黄金集含学历维度（BT v4）</a:t>
             </a:r>
             <a:endParaRPr lang="en-US" sz="1150" dirty="0"/>
           </a:p>
@@ -6130,7 +6130,7 @@
                 <a:ea typeface="SimSun" pitchFamily="34" charset="-122"/>
                 <a:cs typeface="SimSun" pitchFamily="34" charset="-120"/>
               </a:rPr>
-              <a:t>4,393</a:t>
+              <a:t>5,916</a:t>
             </a:r>
             <a:endParaRPr lang="en-US" sz="3800" dirty="0"/>
           </a:p>
@@ -6235,7 +6235,7 @@
                 <a:ea typeface="SimSun" pitchFamily="34" charset="-122"/>
                 <a:cs typeface="SimSun" pitchFamily="34" charset="-120"/>
               </a:rPr>
-              <a:t>140</a:t>
+              <a:t>120</a:t>
             </a:r>
             <a:endParaRPr lang="en-US" sz="3800" dirty="0"/>
           </a:p>
@@ -6733,7 +6733,7 @@
                 <a:ea typeface="Microsoft YaHei" pitchFamily="34" charset="-122"/>
                 <a:cs typeface="Microsoft YaHei" pitchFamily="34" charset="-120"/>
               </a:rPr>
-              <a:t>另有：5 大骨干职能域 + 通用域兜底（LLM 语义命名 + 归类制）· 技能分类权威覆盖 23.9%（用户可见视图 91.7%）· 匹配黄金对 v1/v2 684 组</a:t>
+              <a:t>另有：10 职能域（5 大骨干 + 4 显式语义域 + 通用兜底）· 技能分类权威覆盖 23.9%（用户可见视图 91.7%）· 匹配黄金对 v1/v2 684 组</a:t>
             </a:r>
             <a:endParaRPr lang="en-US" sz="1250" dirty="0"/>
           </a:p>
@@ -6772,7 +6772,7 @@
                 <a:ea typeface="Microsoft YaHei" pitchFamily="34" charset="-122"/>
                 <a:cs typeface="Microsoft YaHei" pitchFamily="34" charset="-120"/>
               </a:rPr>
-              <a:t>注：数据截至 08-29 图谱治理快照，汇报前以 graph_versions 最新快照复核</a:t>
+              <a:t>注：数据截至 graph_v20260903 快照（17705 节点/73575 边）</a:t>
             </a:r>
             <a:endParaRPr lang="en-US" sz="1200" dirty="0"/>
           </a:p>
@@ -9402,7 +9402,7 @@
                 <a:ea typeface="SimSun" pitchFamily="34" charset="-122"/>
                 <a:cs typeface="SimSun" pitchFamily="34" charset="-120"/>
               </a:rPr>
-              <a:t>0.9141</a:t>
+              <a:t>0.9714</a:t>
             </a:r>
             <a:endParaRPr lang="en-US" sz="4600" dirty="0"/>
           </a:p>
@@ -9480,7 +9480,7 @@
                 <a:ea typeface="Microsoft YaHei" pitchFamily="34" charset="-122"/>
                 <a:cs typeface="Microsoft YaHei" pitchFamily="34" charset="-120"/>
               </a:rPr>
-              <a:t>384 对黄金集 · Top-3 命中 100%</a:t>
+              <a:t>384 对黄金集含学历维度（BT v4）</a:t>
             </a:r>
             <a:endParaRPr lang="en-US" sz="1200" dirty="0"/>
           </a:p>
@@ -12222,7 +12222,7 @@
                 <a:ea typeface="Microsoft YaHei" pitchFamily="34" charset="-122"/>
                 <a:cs typeface="Microsoft YaHei" pitchFamily="34" charset="-120"/>
               </a:rPr>
-              <a:t>四项核心指标全部达标：JD 解析 0.9632 · 匹配 0.9141 · 学习路径 96.7% · P95 430ms</a:t>
+              <a:t>四项核心指标全部达标：JD 解析 0.9632 · 匹配 0.9714 · 学习路径 96.7% · P95 430ms</a:t>
             </a:r>
             <a:endParaRPr lang="en-US" sz="1550" dirty="0"/>
           </a:p>
@@ -15767,7 +15767,7 @@
                 <a:ea typeface="Microsoft YaHei" pitchFamily="34" charset="-122"/>
                 <a:cs typeface="Microsoft YaHei" pitchFamily="34" charset="-120"/>
               </a:rPr>
-              <a:t>5 大骨干职能域 + 通用域兜底（LLM 语义命名 + 归类制治理），归类依据逐岗可查</a:t>
+              <a:t>10 职能域常驻（5 大骨干 + 4 显式语义域：网络安全/AI应用与智能体/企业应用与系统/产品与项目管理 + 通用兜底），归类依据逐岗可查</a:t>
             </a:r>
             <a:endParaRPr lang="en-US" sz="1400" dirty="0"/>
           </a:p>

--- a/docs/m5/智岗罗盘_答辩PPT_终稿.pptx
+++ b/docs/m5/智岗罗盘_答辩PPT_终稿.pptx
@@ -4806,7 +4806,7 @@
                 <a:ea typeface="Microsoft YaHei" pitchFamily="34" charset="-122"/>
                 <a:cs typeface="Microsoft YaHei" pitchFamily="34" charset="-120"/>
               </a:rPr>
-              <a:t>110 条 gold 词面豁免口径 · 目标 0.90</a:t>
+              <a:t>110 条 gold · 目标 ≥0.90</a:t>
             </a:r>
             <a:endParaRPr lang="en-US" sz="1150" dirty="0"/>
           </a:p>
@@ -6733,7 +6733,7 @@
                 <a:ea typeface="Microsoft YaHei" pitchFamily="34" charset="-122"/>
                 <a:cs typeface="Microsoft YaHei" pitchFamily="34" charset="-120"/>
               </a:rPr>
-              <a:t>另有：10 职能域（5 大骨干 + 4 显式语义域 + 通用兜底）· 技能分类权威覆盖 23.9%（用户可见视图 91.7%）· 匹配黄金对 v1/v2 684 组</a:t>
+              <a:t>另有：10 职能域（5 大骨干 + 4 显式语义域（网络安全/AI应用与智能体/企业应用与系统/产品与项目管理）+ 通用兜底）· 技能分类权威覆盖 23.9%（用户可见视图 91.7%）· 匹配黄金对 v1/v2 684 组</a:t>
             </a:r>
             <a:endParaRPr lang="en-US" sz="1250" dirty="0"/>
           </a:p>
@@ -15767,7 +15767,7 @@
                 <a:ea typeface="Microsoft YaHei" pitchFamily="34" charset="-122"/>
                 <a:cs typeface="Microsoft YaHei" pitchFamily="34" charset="-120"/>
               </a:rPr>
-              <a:t>10 职能域常驻（5 大骨干 + 4 显式语义域：网络安全/AI应用与智能体/企业应用与系统/产品与项目管理 + 通用兜底），归类依据逐岗可查</a:t>
+              <a:t>10 职能域（5 大骨干 + 4 显式语义域（网络安全/AI应用与智能体/企业应用与系统/产品与项目管理）+ 通用兜底），归类依据逐岗可查</a:t>
             </a:r>
             <a:endParaRPr lang="en-US" sz="1400" dirty="0"/>
           </a:p>

--- a/docs/m5/智岗罗盘_答辩PPT_终稿.pptx
+++ b/docs/m5/智岗罗盘_答辩PPT_终稿.pptx
@@ -2275,10 +2275,28 @@
           <a:lstStyle/>
           <a:p>
             <a:r>
-              <a:rPr lang="en-US" dirty="0"/>
-              <a:t/>
-            </a:r>
-            <a:endParaRPr lang="en-US" dirty="0"/>
+              <a:t>兜底机制四层说明（均有代码实现，见第九轮审查修复 0fb97c63）：</a:t>
+            </a:r>
+          </a:p>
+          <a:p>
+            <a:r>
+              <a:t>① 抽取层：LLM 调用异常按 超时/限流/5xx/连接 分类映射，多 Provider 指数退避重试；全部 Provider 失败则降级词典/正则规则抽取，结果标记待人工复核（audit 队列）——主流程不阻断、任务可重入。</a:t>
+            </a:r>
+          </a:p>
+          <a:p>
+            <a:r>
+              <a:t>② 门控层：新兴趋势聚合在 position_name 缺失时，从岗位快照做归一化兜底（normalized_position_from_snapshot），单条脏数据不中断聚合。</a:t>
+            </a:r>
+          </a:p>
+          <a:p>
+            <a:r>
+              <a:t>③ 解释层：技能解释 LLM 补齐失败仅记日志并继续；空返回 / 超长返回（&gt;500 字）直接拒绝、不落库。</a:t>
+            </a:r>
+          </a:p>
+          <a:p>
+            <a:r>
+              <a:t>④ 应用层：前端缓存键序列化失败时生成确定性占位键（禁静默 fallback），防止缓存串写。</a:t>
+            </a:r>
           </a:p>
         </p:txBody>
       </p:sp>
@@ -14914,6 +14932,10 @@
             <a:prstDash val="solid"/>
           </a:ln>
         </p:spPr>
+        <p:txBody>
+          <a:bodyPr/>
+          <a:p/>
+        </p:txBody>
       </p:sp>
       <p:sp>
         <p:nvSpPr>
@@ -15019,6 +15041,10 @@
             <a:prstDash val="solid"/>
           </a:ln>
         </p:spPr>
+        <p:txBody>
+          <a:bodyPr/>
+          <a:p/>
+        </p:txBody>
       </p:sp>
       <p:sp>
         <p:nvSpPr>
@@ -15124,6 +15150,10 @@
             <a:prstDash val="solid"/>
           </a:ln>
         </p:spPr>
+        <p:txBody>
+          <a:bodyPr/>
+          <a:p/>
+        </p:txBody>
       </p:sp>
       <p:sp>
         <p:nvSpPr>
@@ -15340,6 +15370,10 @@
             </a:outerShdw>
           </a:effectLst>
         </p:spPr>
+        <p:txBody>
+          <a:bodyPr/>
+          <a:p/>
+        </p:txBody>
       </p:sp>
       <p:pic>
         <p:nvPicPr>
@@ -15350,7 +15384,7 @@
           <p:nvPr/>
         </p:nvPicPr>
         <p:blipFill>
-          <a:blip r:embed="rId1"/>
+          <a:blip r:embed="rId4"/>
           <a:srcRect l="0" r="0" t="0" b="0"/>
           <a:stretch/>
         </p:blipFill>
@@ -15397,7 +15431,7 @@
                 <a:ea typeface="Microsoft YaHei" pitchFamily="34" charset="-122"/>
                 <a:cs typeface="Microsoft YaHei" pitchFamily="34" charset="-120"/>
               </a:rPr>
-              <a:t>▲ 数据治理管线：采集 → 清洗 → 去重 → 质量评分</a:t>
+              <a:t>▲ 爬取管理实时监控 · 清洗管线：去重 → 质量评分（后台执行）</a:t>
             </a:r>
             <a:endParaRPr lang="en-US" sz="1200" dirty="0"/>
           </a:p>
@@ -16012,6 +16046,10 @@
             <a:prstDash val="solid"/>
           </a:ln>
         </p:spPr>
+        <p:txBody>
+          <a:bodyPr/>
+          <a:p/>
+        </p:txBody>
       </p:sp>
       <p:sp>
         <p:nvSpPr>
@@ -16156,6 +16194,10 @@
             <a:prstDash val="solid"/>
           </a:ln>
         </p:spPr>
+        <p:txBody>
+          <a:bodyPr/>
+          <a:p/>
+        </p:txBody>
       </p:sp>
       <p:sp>
         <p:nvSpPr>
@@ -16300,6 +16342,10 @@
             <a:prstDash val="solid"/>
           </a:ln>
         </p:spPr>
+        <p:txBody>
+          <a:bodyPr/>
+          <a:p/>
+        </p:txBody>
       </p:sp>
       <p:sp>
         <p:nvSpPr>
@@ -16727,6 +16773,42 @@
               <a:t>Source: 110 条 gold 人工标注盲审（词面真值对齐口径）</a:t>
             </a:r>
             <a:endParaRPr lang="en-US" sz="1200" dirty="0"/>
+          </a:p>
+        </p:txBody>
+      </p:sp>
+      <p:sp>
+        <p:nvSpPr>
+          <p:cNvPr id="26" name="TextBox 25"/>
+          <p:cNvSpPr txBox="1"/>
+          <p:nvPr/>
+        </p:nvSpPr>
+        <p:spPr>
+          <a:xfrm>
+            <a:off x="457200" y="3813048"/>
+            <a:ext cx="11274552" cy="256032"/>
+          </a:xfrm>
+          <a:prstGeom prst="rect">
+            <a:avLst/>
+          </a:prstGeom>
+          <a:noFill/>
+        </p:spPr>
+        <p:txBody>
+          <a:bodyPr wrap="none" lIns="0" rIns="0" tIns="0" bIns="0">
+            <a:spAutoFit/>
+          </a:bodyPr>
+          <a:lstStyle/>
+          <a:p>
+            <a:r>
+              <a:rPr lang="en-US" sz="1150" dirty="0">
+                <a:solidFill>
+                  <a:srgbClr val="9AA9BA"/>
+                </a:solidFill>
+                <a:latin typeface="Microsoft YaHei" pitchFamily="34" charset="0"/>
+                <a:ea typeface="Microsoft YaHei" pitchFamily="34" charset="-122"/>
+                <a:cs typeface="Microsoft YaHei" pitchFamily="34" charset="-120"/>
+              </a:rPr>
+              <a:t>兜底机制：LLM 失败 → 多 Provider 退避重试 → 词典 / 正则规则兜底 → 标记人工复核，流程不阻断、全程可重入</a:t>
+            </a:r>
           </a:p>
         </p:txBody>
       </p:sp>
@@ -16910,6 +16992,10 @@
             </a:outerShdw>
           </a:effectLst>
         </p:spPr>
+        <p:txBody>
+          <a:bodyPr/>
+          <a:p/>
+        </p:txBody>
       </p:sp>
       <p:pic>
         <p:nvPicPr>
@@ -17031,7 +17117,7 @@
                 <a:ea typeface="Microsoft YaHei" pitchFamily="34" charset="-122"/>
                 <a:cs typeface="Microsoft YaHei" pitchFamily="34" charset="-120"/>
               </a:rPr>
-              <a:t>语义增强：SBERT 多语言向量 + Bradley-Terry 权重学习（Spearman 0.88）</a:t>
+              <a:t>语义增强：SBERT 多语言向量 + Bradley-Terry 权重学习（Spearman 0.7853）</a:t>
             </a:r>
             <a:endParaRPr lang="en-US" sz="1400" dirty="0"/>
           </a:p>

--- a/docs/m5/智岗罗盘_答辩PPT_终稿.pptx
+++ b/docs/m5/智岗罗盘_答辩PPT_终稿.pptx
@@ -15697,7 +15697,7 @@
       </p:sp>
       <p:pic>
         <p:nvPicPr>
-          <p:cNvPr id="19" name="Image 0" descr="images/image-evolution_16x9.jpg">    </p:cNvPr>
+          <p:cNvPr id="19" name="Image 0" descr="images/image-pipeline_16x9.jpg">    </p:cNvPr>
           <p:cNvPicPr>
             <a:picLocks noChangeAspect="1"/>
           </p:cNvPicPr>
